--- a/files/04-Advanced_Object-Oriented_Design_and_Programming/Unit_6/Unit_6_Seminar_Title_Concurrency_and_Parallelism_in_Object-Oriented_Design.pptx
+++ b/files/04-Advanced_Object-Oriented_Design_and_Programming/Unit_6/Unit_6_Seminar_Title_Concurrency_and_Parallelism_in_Object-Oriented_Design.pptx
@@ -5,10 +5,10 @@
     <p:sldMasterId id="2147483648" r:id="rId4"/>
   </p:sldMasterIdLst>
   <p:notesMasterIdLst>
-    <p:notesMasterId r:id="rId14"/>
+    <p:notesMasterId r:id="rId15"/>
   </p:notesMasterIdLst>
   <p:handoutMasterIdLst>
-    <p:handoutMasterId r:id="rId15"/>
+    <p:handoutMasterId r:id="rId16"/>
   </p:handoutMasterIdLst>
   <p:sldIdLst>
     <p:sldId id="292" r:id="rId5"/>
@@ -20,6 +20,7 @@
     <p:sldId id="301" r:id="rId11"/>
     <p:sldId id="302" r:id="rId12"/>
     <p:sldId id="300" r:id="rId13"/>
+    <p:sldId id="303" r:id="rId14"/>
   </p:sldIdLst>
   <p:sldSz cx="12192000" cy="6858000"/>
   <p:notesSz cx="6858000" cy="9144000"/>
@@ -240,7 +241,7 @@
           <a:p>
             <a:fld id="{8CD26A2A-0A96-0647-84E5-C82F2EFD9474}" type="datetimeFigureOut">
               <a:rPr lang="en-US" smtClean="0"/>
-              <a:t>5/22/2026</a:t>
+              <a:t>5/28/2026</a:t>
             </a:fld>
             <a:endParaRPr lang="en-US" dirty="0"/>
           </a:p>
@@ -505,7 +506,7 @@
           <a:p>
             <a:fld id="{5B0CF20C-6BCC-41A4-8C16-5A346425718D}" type="datetimeFigureOut">
               <a:rPr lang="en-US" smtClean="0"/>
-              <a:t>5/22/2026</a:t>
+              <a:t>5/28/2026</a:t>
             </a:fld>
             <a:endParaRPr lang="en-US" dirty="0"/>
           </a:p>
@@ -11939,6 +11940,199 @@
     <p:extLst>
       <p:ext uri="{BB962C8B-B14F-4D97-AF65-F5344CB8AC3E}">
         <p14:creationId xmlns:p14="http://schemas.microsoft.com/office/powerpoint/2010/main" val="3898447929"/>
+      </p:ext>
+    </p:extLst>
+  </p:cSld>
+  <p:clrMapOvr>
+    <a:masterClrMapping/>
+  </p:clrMapOvr>
+</p:sld>
+</file>
+
+<file path=ppt/slides/slide10.xml><?xml version="1.0" encoding="utf-8"?>
+<p:sld xmlns:a="http://schemas.openxmlformats.org/drawingml/2006/main" xmlns:r="http://schemas.openxmlformats.org/officeDocument/2006/relationships" xmlns:p="http://schemas.openxmlformats.org/presentationml/2006/main">
+  <p:cSld>
+    <p:spTree>
+      <p:nvGrpSpPr>
+        <p:cNvPr id="1" name="">
+          <a:extLst>
+            <a:ext uri="{FF2B5EF4-FFF2-40B4-BE49-F238E27FC236}">
+              <a16:creationId xmlns:a16="http://schemas.microsoft.com/office/drawing/2014/main" id="{164CF178-26BF-F019-3DD4-AADDB138430E}"/>
+            </a:ext>
+          </a:extLst>
+        </p:cNvPr>
+        <p:cNvGrpSpPr/>
+        <p:nvPr/>
+      </p:nvGrpSpPr>
+      <p:grpSpPr>
+        <a:xfrm>
+          <a:off x="0" y="0"/>
+          <a:ext cx="0" cy="0"/>
+          <a:chOff x="0" y="0"/>
+          <a:chExt cx="0" cy="0"/>
+        </a:xfrm>
+      </p:grpSpPr>
+      <p:sp>
+        <p:nvSpPr>
+          <p:cNvPr id="5" name="Slide Number Placeholder 4">
+            <a:extLst>
+              <a:ext uri="{FF2B5EF4-FFF2-40B4-BE49-F238E27FC236}">
+                <a16:creationId xmlns:a16="http://schemas.microsoft.com/office/drawing/2014/main" id="{E00E7CD7-2401-7A56-7C61-274F6181BE8B}"/>
+              </a:ext>
+            </a:extLst>
+          </p:cNvPr>
+          <p:cNvSpPr>
+            <a:spLocks noGrp="1"/>
+          </p:cNvSpPr>
+          <p:nvPr>
+            <p:ph type="sldNum" sz="quarter" idx="4294967295"/>
+          </p:nvPr>
+        </p:nvSpPr>
+        <p:spPr>
+          <a:xfrm>
+            <a:off x="11733213" y="6218238"/>
+            <a:ext cx="458787" cy="365125"/>
+          </a:xfrm>
+        </p:spPr>
+        <p:txBody>
+          <a:bodyPr/>
+          <a:lstStyle/>
+          <a:p>
+            <a:fld id="{47FEACEE-25B4-4A2D-B147-27296E36371D}" type="slidenum">
+              <a:rPr lang="en-US" altLang="zh-CN" noProof="0" smtClean="0"/>
+              <a:pPr/>
+              <a:t>10</a:t>
+            </a:fld>
+            <a:endParaRPr lang="en-US" altLang="zh-CN" noProof="0" dirty="0"/>
+          </a:p>
+        </p:txBody>
+      </p:sp>
+      <p:sp>
+        <p:nvSpPr>
+          <p:cNvPr id="18" name="TextBox 17">
+            <a:extLst>
+              <a:ext uri="{FF2B5EF4-FFF2-40B4-BE49-F238E27FC236}">
+                <a16:creationId xmlns:a16="http://schemas.microsoft.com/office/drawing/2014/main" id="{A1EE784A-AB6C-953E-36B4-847C079A0091}"/>
+              </a:ext>
+            </a:extLst>
+          </p:cNvPr>
+          <p:cNvSpPr txBox="1"/>
+          <p:nvPr/>
+        </p:nvSpPr>
+        <p:spPr>
+          <a:xfrm>
+            <a:off x="529490" y="1344477"/>
+            <a:ext cx="3931110" cy="584775"/>
+          </a:xfrm>
+          <a:prstGeom prst="rect">
+            <a:avLst/>
+          </a:prstGeom>
+          <a:noFill/>
+        </p:spPr>
+        <p:txBody>
+          <a:bodyPr wrap="square">
+            <a:spAutoFit/>
+          </a:bodyPr>
+          <a:lstStyle/>
+          <a:p>
+            <a:pPr algn="ctr"/>
+            <a:r>
+              <a:rPr lang="en-US" sz="3200" b="1" i="0" dirty="0">
+                <a:solidFill>
+                  <a:srgbClr val="FFFFFF"/>
+                </a:solidFill>
+                <a:latin typeface="Calibri"/>
+              </a:rPr>
+              <a:t>Use of Digital Tools</a:t>
+            </a:r>
+          </a:p>
+        </p:txBody>
+      </p:sp>
+      <p:sp>
+        <p:nvSpPr>
+          <p:cNvPr id="21" name="TextBox 20">
+            <a:extLst>
+              <a:ext uri="{FF2B5EF4-FFF2-40B4-BE49-F238E27FC236}">
+                <a16:creationId xmlns:a16="http://schemas.microsoft.com/office/drawing/2014/main" id="{09083F31-51BC-BEC9-CBDC-C3AC31D1A396}"/>
+              </a:ext>
+            </a:extLst>
+          </p:cNvPr>
+          <p:cNvSpPr txBox="1"/>
+          <p:nvPr/>
+        </p:nvSpPr>
+        <p:spPr>
+          <a:xfrm>
+            <a:off x="2116741" y="2374202"/>
+            <a:ext cx="9365857" cy="2585323"/>
+          </a:xfrm>
+          <a:prstGeom prst="rect">
+            <a:avLst/>
+          </a:prstGeom>
+          <a:noFill/>
+        </p:spPr>
+        <p:txBody>
+          <a:bodyPr wrap="square">
+            <a:spAutoFit/>
+          </a:bodyPr>
+          <a:lstStyle/>
+          <a:p>
+            <a:r>
+              <a:rPr lang="en-US" dirty="0">
+                <a:solidFill>
+                  <a:schemeClr val="bg1"/>
+                </a:solidFill>
+                <a:latin typeface="Calibri" panose="020F0502020204030204" pitchFamily="34" charset="0"/>
+                <a:ea typeface="Calibri" panose="020F0502020204030204" pitchFamily="34" charset="0"/>
+                <a:cs typeface="Calibri" panose="020F0502020204030204" pitchFamily="34" charset="0"/>
+              </a:rPr>
+              <a:t>This document has been produced exclusively for educational purposes. Referenced content, copyrights, and trademarks, remain the sole property of the respective owner. </a:t>
+            </a:r>
+          </a:p>
+          <a:p>
+            <a:r>
+              <a:rPr lang="en-US" dirty="0">
+                <a:solidFill>
+                  <a:schemeClr val="bg1"/>
+                </a:solidFill>
+                <a:latin typeface="Calibri" panose="020F0502020204030204" pitchFamily="34" charset="0"/>
+                <a:ea typeface="Calibri" panose="020F0502020204030204" pitchFamily="34" charset="0"/>
+                <a:cs typeface="Calibri" panose="020F0502020204030204" pitchFamily="34" charset="0"/>
+              </a:rPr>
+              <a:t>ChatGPT 5.5 was used for some proofreading and clarity as well as literature exploration, language refinement, coding and programming techniques research.</a:t>
+            </a:r>
+          </a:p>
+          <a:p>
+            <a:r>
+              <a:rPr lang="en-US" dirty="0">
+                <a:solidFill>
+                  <a:schemeClr val="bg1"/>
+                </a:solidFill>
+                <a:latin typeface="Calibri" panose="020F0502020204030204" pitchFamily="34" charset="0"/>
+                <a:ea typeface="Calibri" panose="020F0502020204030204" pitchFamily="34" charset="0"/>
+                <a:cs typeface="Calibri" panose="020F0502020204030204" pitchFamily="34" charset="0"/>
+              </a:rPr>
+              <a:t>All academic writing, analysis, argumentation, and conclusions represent the original work of the author.  AI tools were used for exploration, same way as academic literature exploration.</a:t>
+            </a:r>
+          </a:p>
+          <a:p>
+            <a:r>
+              <a:rPr lang="en-US" dirty="0">
+                <a:solidFill>
+                  <a:schemeClr val="bg1"/>
+                </a:solidFill>
+                <a:latin typeface="Calibri" panose="020F0502020204030204" pitchFamily="34" charset="0"/>
+                <a:ea typeface="Calibri" panose="020F0502020204030204" pitchFamily="34" charset="0"/>
+                <a:cs typeface="Calibri" panose="020F0502020204030204" pitchFamily="34" charset="0"/>
+              </a:rPr>
+              <a:t>Any use of content mentioned in this document is properly referenced to its original author and was used responsibly to ensure integrity and originality. I have used Artificial Intelligence responsibly and ethically, in accordance with the assignment brief. </a:t>
+            </a:r>
+          </a:p>
+        </p:txBody>
+      </p:sp>
+    </p:spTree>
+    <p:extLst>
+      <p:ext uri="{BB962C8B-B14F-4D97-AF65-F5344CB8AC3E}">
+        <p14:creationId xmlns:p14="http://schemas.microsoft.com/office/powerpoint/2010/main" val="820350191"/>
       </p:ext>
     </p:extLst>
   </p:cSld>
@@ -17601,6 +17795,35 @@
 </file>
 
 <file path=customXml/item1.xml><?xml version="1.0" encoding="utf-8"?>
+<?mso-contentType ?>
+<FormTemplates xmlns="http://schemas.microsoft.com/sharepoint/v3/contenttype/forms">
+  <Display>DocumentLibraryForm</Display>
+  <Edit>DocumentLibraryForm</Edit>
+  <New>DocumentLibraryForm</New>
+</FormTemplates>
+</file>
+
+<file path=customXml/item2.xml><?xml version="1.0" encoding="utf-8"?>
+<p:properties xmlns:p="http://schemas.microsoft.com/office/2006/metadata/properties" xmlns:xsi="http://www.w3.org/2001/XMLSchema-instance" xmlns:pc="http://schemas.microsoft.com/office/infopath/2007/PartnerControls">
+  <documentManagement>
+    <_ip_UnifiedCompliancePolicyUIAction xmlns="http://schemas.microsoft.com/sharepoint/v3" xsi:nil="true"/>
+    <Image xmlns="71af3243-3dd4-4a8d-8c0d-dd76da1f02a5">
+      <Url xsi:nil="true"/>
+      <Description xsi:nil="true"/>
+    </Image>
+    <Status xmlns="71af3243-3dd4-4a8d-8c0d-dd76da1f02a5">Not started</Status>
+    <Background xmlns="71af3243-3dd4-4a8d-8c0d-dd76da1f02a5">false</Background>
+    <_ip_UnifiedCompliancePolicyProperties xmlns="http://schemas.microsoft.com/sharepoint/v3" xsi:nil="true"/>
+    <ImageTagsTaxHTField xmlns="71af3243-3dd4-4a8d-8c0d-dd76da1f02a5">
+      <Terms xmlns="http://schemas.microsoft.com/office/infopath/2007/PartnerControls"/>
+    </ImageTagsTaxHTField>
+    <TaxCatchAll xmlns="230e9df3-be65-4c73-a93b-d1236ebd677e" xsi:nil="true"/>
+    <MediaServiceKeyPoints xmlns="71af3243-3dd4-4a8d-8c0d-dd76da1f02a5" xsi:nil="true"/>
+  </documentManagement>
+</p:properties>
+</file>
+
+<file path=customXml/item3.xml><?xml version="1.0" encoding="utf-8"?>
 <ct:contentTypeSchema xmlns:ct="http://schemas.microsoft.com/office/2006/metadata/contentType" xmlns:ma="http://schemas.microsoft.com/office/2006/metadata/properties/metaAttributes" ct:_="" ma:_="" ma:contentTypeName="Document" ma:contentTypeID="0x01010079F111ED35F8CC479449609E8A0923A6" ma:contentTypeVersion="30" ma:contentTypeDescription="Create a new document." ma:contentTypeScope="" ma:versionID="cec0622158e8f13124e9e8fd4de31bd1">
   <xsd:schema xmlns:xsd="http://www.w3.org/2001/XMLSchema" xmlns:xs="http://www.w3.org/2001/XMLSchema" xmlns:p="http://schemas.microsoft.com/office/2006/metadata/properties" xmlns:ns1="http://schemas.microsoft.com/sharepoint/v3" xmlns:ns2="71af3243-3dd4-4a8d-8c0d-dd76da1f02a5" xmlns:ns3="16c05727-aa75-4e4a-9b5f-8a80a1165891" xmlns:ns4="230e9df3-be65-4c73-a93b-d1236ebd677e" targetNamespace="http://schemas.microsoft.com/office/2006/metadata/properties" ma:root="true" ma:fieldsID="3b52f30ab005d15df08657af532e6e38" ns1:_="" ns2:_="" ns3:_="" ns4:_="">
     <xsd:import namespace="http://schemas.microsoft.com/sharepoint/v3"/>
@@ -17918,36 +18141,27 @@
 </ct:contentTypeSchema>
 </file>
 
-<file path=customXml/item2.xml><?xml version="1.0" encoding="utf-8"?>
-<p:properties xmlns:p="http://schemas.microsoft.com/office/2006/metadata/properties" xmlns:xsi="http://www.w3.org/2001/XMLSchema-instance" xmlns:pc="http://schemas.microsoft.com/office/infopath/2007/PartnerControls">
-  <documentManagement>
-    <_ip_UnifiedCompliancePolicyUIAction xmlns="http://schemas.microsoft.com/sharepoint/v3" xsi:nil="true"/>
-    <Image xmlns="71af3243-3dd4-4a8d-8c0d-dd76da1f02a5">
-      <Url xsi:nil="true"/>
-      <Description xsi:nil="true"/>
-    </Image>
-    <Status xmlns="71af3243-3dd4-4a8d-8c0d-dd76da1f02a5">Not started</Status>
-    <Background xmlns="71af3243-3dd4-4a8d-8c0d-dd76da1f02a5">false</Background>
-    <_ip_UnifiedCompliancePolicyProperties xmlns="http://schemas.microsoft.com/sharepoint/v3" xsi:nil="true"/>
-    <ImageTagsTaxHTField xmlns="71af3243-3dd4-4a8d-8c0d-dd76da1f02a5">
-      <Terms xmlns="http://schemas.microsoft.com/office/infopath/2007/PartnerControls"/>
-    </ImageTagsTaxHTField>
-    <TaxCatchAll xmlns="230e9df3-be65-4c73-a93b-d1236ebd677e" xsi:nil="true"/>
-    <MediaServiceKeyPoints xmlns="71af3243-3dd4-4a8d-8c0d-dd76da1f02a5" xsi:nil="true"/>
-  </documentManagement>
-</p:properties>
+<file path=customXml/itemProps1.xml><?xml version="1.0" encoding="utf-8"?>
+<ds:datastoreItem xmlns:ds="http://schemas.openxmlformats.org/officeDocument/2006/customXml" ds:itemID="{B0009351-EDD4-484E-ACD6-D50CCB137637}">
+  <ds:schemaRefs>
+    <ds:schemaRef ds:uri="http://schemas.microsoft.com/sharepoint/v3/contenttype/forms"/>
+  </ds:schemaRefs>
+</ds:datastoreItem>
 </file>
 
-<file path=customXml/item3.xml><?xml version="1.0" encoding="utf-8"?>
-<?mso-contentType ?>
-<FormTemplates xmlns="http://schemas.microsoft.com/sharepoint/v3/contenttype/forms">
-  <Display>DocumentLibraryForm</Display>
-  <Edit>DocumentLibraryForm</Edit>
-  <New>DocumentLibraryForm</New>
-</FormTemplates>
+<file path=customXml/itemProps2.xml><?xml version="1.0" encoding="utf-8"?>
+<ds:datastoreItem xmlns:ds="http://schemas.openxmlformats.org/officeDocument/2006/customXml" ds:itemID="{C8DB3C62-858A-4A01-AFEF-21E0BB8CE262}">
+  <ds:schemaRefs>
+    <ds:schemaRef ds:uri="http://schemas.microsoft.com/office/2006/metadata/properties"/>
+    <ds:schemaRef ds:uri="http://schemas.microsoft.com/office/infopath/2007/PartnerControls"/>
+    <ds:schemaRef ds:uri="http://schemas.microsoft.com/sharepoint/v3"/>
+    <ds:schemaRef ds:uri="71af3243-3dd4-4a8d-8c0d-dd76da1f02a5"/>
+    <ds:schemaRef ds:uri="230e9df3-be65-4c73-a93b-d1236ebd677e"/>
+  </ds:schemaRefs>
+</ds:datastoreItem>
 </file>
 
-<file path=customXml/itemProps1.xml><?xml version="1.0" encoding="utf-8"?>
+<file path=customXml/itemProps3.xml><?xml version="1.0" encoding="utf-8"?>
 <ds:datastoreItem xmlns:ds="http://schemas.openxmlformats.org/officeDocument/2006/customXml" ds:itemID="{79897CAE-455D-42C9-A951-0C21BC122543}">
   <ds:schemaRefs>
     <ds:schemaRef ds:uri="http://schemas.microsoft.com/office/2006/metadata/contentType"/>
@@ -17968,26 +18182,6 @@
 </ds:datastoreItem>
 </file>
 
-<file path=customXml/itemProps2.xml><?xml version="1.0" encoding="utf-8"?>
-<ds:datastoreItem xmlns:ds="http://schemas.openxmlformats.org/officeDocument/2006/customXml" ds:itemID="{C8DB3C62-858A-4A01-AFEF-21E0BB8CE262}">
-  <ds:schemaRefs>
-    <ds:schemaRef ds:uri="http://schemas.microsoft.com/office/2006/metadata/properties"/>
-    <ds:schemaRef ds:uri="http://schemas.microsoft.com/office/infopath/2007/PartnerControls"/>
-    <ds:schemaRef ds:uri="http://schemas.microsoft.com/sharepoint/v3"/>
-    <ds:schemaRef ds:uri="71af3243-3dd4-4a8d-8c0d-dd76da1f02a5"/>
-    <ds:schemaRef ds:uri="230e9df3-be65-4c73-a93b-d1236ebd677e"/>
-  </ds:schemaRefs>
-</ds:datastoreItem>
-</file>
-
-<file path=customXml/itemProps3.xml><?xml version="1.0" encoding="utf-8"?>
-<ds:datastoreItem xmlns:ds="http://schemas.openxmlformats.org/officeDocument/2006/customXml" ds:itemID="{B0009351-EDD4-484E-ACD6-D50CCB137637}">
-  <ds:schemaRefs>
-    <ds:schemaRef ds:uri="http://schemas.microsoft.com/sharepoint/v3/contenttype/forms"/>
-  </ds:schemaRefs>
-</ds:datastoreItem>
-</file>
-
 <file path=docMetadata/LabelInfo.xml><?xml version="1.0" encoding="utf-8"?>
 <clbl:labelList xmlns:clbl="http://schemas.microsoft.com/office/2020/mipLabelMetadata"/>
 </file>